--- a/public/fun/pack/pptx/birthdaypro/돌잔치프리미엄_25_첫번째이야기중심_선셋로즈.pptx
+++ b/public/fun/pack/pptx/birthdaypro/돌잔치프리미엄_25_첫번째이야기중심_선셋로즈.pptx
@@ -112,12 +112,12 @@
   <p:extLst>
     <p:ext uri="{521415D9-36F7-43E2-AB2F-B90AF26B5E84}">
       <p14:sectionLst xmlns:p14="http://schemas.microsoft.com/office/powerpoint/2010/main">
-        <p14:section name="시작" id="{7468462C-51CF-423D-B75A-FFB885B40E9A}">
+        <p14:section name="시작" id="{5535CE8A-D81E-49E5-B434-9217D65A3CD1}">
           <p14:sldIdLst>
             <p14:sldId id="256"/>
           </p14:sldIdLst>
         </p14:section>
-        <p14:section name="본문" id="{663BF76C-56CA-4C17-93C5-32A47BCC5504}">
+        <p14:section name="본문" id="{72907AE1-4D9B-4873-B90A-2DEB48B7D4DF}">
           <p14:sldIdLst>
             <p14:sldId id="257"/>
             <p14:sldId id="258"/>
@@ -125,7 +125,7 @@
             <p14:sldId id="260"/>
           </p14:sldIdLst>
         </p14:section>
-        <p14:section name="마무리" id="{93837BFF-A7BE-4B71-93B8-6813AD075474}">
+        <p14:section name="마무리" id="{23549CE6-A540-49F3-88A2-A26BE0AA160C}">
           <p14:sldIdLst>
             <p14:sldId id="261"/>
           </p14:sldIdLst>
@@ -1896,7 +1896,7 @@
             </a:lvl1pPr>
           </a:lstStyle>
           <a:p>
-            <a:fld id="{B5D96120-8239-4E7D-9DFC-36EB5A5DDCF9}" type="slidenum">
+            <a:fld id="{BCB47FD7-22A6-4F7C-8257-01A8E4D4A9B2}" type="slidenum">
               <a:rPr lang="en-US"/>
               <a:t>‹#›</a:t>
             </a:fld>
@@ -3013,7 +3013,7 @@
             </a:lvl1pPr>
           </a:lstStyle>
           <a:p>
-            <a:fld id="{10E611E9-5BC8-4EE0-8343-DD53D2EB3456}" type="slidenum">
+            <a:fld id="{29752940-C394-4366-B6AF-9CCB586536D5}" type="slidenum">
               <a:rPr lang="en-US"/>
               <a:t>‹#›</a:t>
             </a:fld>
@@ -3705,7 +3705,7 @@
             </a:lvl1pPr>
           </a:lstStyle>
           <a:p>
-            <a:fld id="{0415F6A5-82CF-4F95-8139-336F4719421C}" type="slidenum">
+            <a:fld id="{2FF52EF0-6311-40D3-89C8-EFA75D747FC5}" type="slidenum">
               <a:rPr lang="en-US"/>
               <a:t>‹#›</a:t>
             </a:fld>
@@ -4528,7 +4528,7 @@
           <a:p>
             <a:r>
               <a:rPr lang="ko-KR"/>
-              <a:t>태어나서 처음 맞은 여름 이야기입니다</a:t>
+              <a:t>태어나서 처음 맞은 날들의 이야기입니다</a:t>
             </a:r>
           </a:p>
         </p:txBody>
@@ -4550,7 +4550,7 @@
           <a:p>
             <a:r>
               <a:rPr lang="ko-KR"/>
-              <a:t>아기 이름 · 0000. 00. 00</a:t>
+              <a:t>아기 이름 · 날짜 입력</a:t>
             </a:r>
           </a:p>
           <a:p>
@@ -4711,7 +4711,7 @@
           <a:bodyPr/>
           <a:lstStyle/>
           <a:p>
-            <a:fld id="{F4ECD55A-8C74-404F-A840-C9B4246613BD}" type="slidenum">
+            <a:fld id="{FDDC8B3B-FFE5-4758-9860-8C041C022903}" type="slidenum">
               <a:rPr lang="en-US"/>
               <a:t>‹#›</a:t>
             </a:fld>
@@ -5311,7 +5311,7 @@
           <a:bodyPr/>
           <a:lstStyle/>
           <a:p>
-            <a:fld id="{014E887B-0786-4614-8EB0-490FA7D15829}" type="slidenum">
+            <a:fld id="{72EBF442-4CF8-4636-9EE7-63FDACE49AD3}" type="slidenum">
               <a:rPr lang="en-US"/>
               <a:t>‹#›</a:t>
             </a:fld>
@@ -6286,7 +6286,7 @@
           <a:bodyPr/>
           <a:lstStyle/>
           <a:p>
-            <a:fld id="{FD8B96D5-317B-438A-A4C4-D70CA59842C9}" type="slidenum">
+            <a:fld id="{65E017F7-327F-422C-8BC3-0F2B4E9EB07D}" type="slidenum">
               <a:rPr lang="en-US"/>
               <a:t>‹#›</a:t>
             </a:fld>
@@ -7916,7 +7916,7 @@
           <a:bodyPr/>
           <a:lstStyle/>
           <a:p>
-            <a:fld id="{553F746F-6A6A-4D76-B3F4-DD6CE316B6A4}" type="slidenum">
+            <a:fld id="{6C9D3465-7B2F-407E-9173-3E4DE6E226B3}" type="slidenum">
               <a:rPr lang="en-US"/>
               <a:t>‹#›</a:t>
             </a:fld>
